--- a/examples/repositories/html-editable-showcase/deck.pptx
+++ b/examples/repositories/html-editable-showcase/deck.pptx
@@ -3128,7 +3128,7 @@
           <a:fillRef idx="3">
             <a:schemeClr val="accent1"/>
           </a:fillRef>
-          <a:effectRef idx="2">
+          <a:effectRef idx="0">
             <a:schemeClr val="accent1"/>
           </a:effectRef>
           <a:fontRef idx="minor">
@@ -3145,7 +3145,7 @@
       </p:sp>
       <p:sp>
         <p:nvSpPr>
-          <p:cNvPr id="3" name="Rectangle 2"/>
+          <p:cNvPr id="9" name="NativeFlag:five-vertex-cloth"/>
           <p:cNvSpPr/>
           <p:nvPr/>
         </p:nvSpPr>
@@ -3154,9 +3154,33 @@
             <a:off x="9144000" y="1809750"/>
             <a:ext cx="2000250" cy="1555750"/>
           </a:xfrm>
-          <a:prstGeom prst="rect">
+          <a:custGeom>
             <a:avLst/>
-          </a:prstGeom>
+            <a:gdLst/>
+            <a:ahLst/>
+            <a:cxnLst/>
+            <a:rect l="l" t="t" r="r" b="b"/>
+            <a:pathLst>
+              <a:path w="630" h="490">
+                <a:moveTo>
+                  <a:pt x="0" y="0"/>
+                </a:moveTo>
+                <a:lnTo>
+                  <a:pt x="630" y="0"/>
+                </a:lnTo>
+                <a:lnTo>
+                  <a:pt x="470" y="245"/>
+                </a:lnTo>
+                <a:lnTo>
+                  <a:pt x="630" y="490"/>
+                </a:lnTo>
+                <a:lnTo>
+                  <a:pt x="0" y="490"/>
+                </a:lnTo>
+                <a:close/>
+              </a:path>
+            </a:pathLst>
+          </a:custGeom>
           <a:solidFill>
             <a:srgbClr val="38271F"/>
           </a:solidFill>
@@ -3171,7 +3195,7 @@
           <a:fillRef idx="3">
             <a:schemeClr val="accent1"/>
           </a:fillRef>
-          <a:effectRef idx="2">
+          <a:effectRef idx="0">
             <a:schemeClr val="accent1"/>
           </a:effectRef>
           <a:fontRef idx="minor">
@@ -3186,118 +3210,9 @@
           </a:p>
         </p:txBody>
       </p:sp>
-      <p:cxnSp>
-        <p:nvCxnSpPr>
-          <p:cNvPr id="4" name="Connector 3"/>
-          <p:cNvCxnSpPr/>
-          <p:nvPr/>
-        </p:nvCxnSpPr>
-        <p:spPr>
-          <a:xfrm>
-            <a:off x="9144000" y="1809750"/>
-            <a:ext cx="2000250" cy="0"/>
-          </a:xfrm>
-          <a:prstGeom prst="line">
-            <a:avLst/>
-          </a:prstGeom>
-          <a:ln w="774700">
-            <a:solidFill>
-              <a:srgbClr val="000000">
-                <a:alpha val="0"/>
-              </a:srgbClr>
-            </a:solidFill>
-          </a:ln>
-        </p:spPr>
-        <p:style>
-          <a:lnRef idx="2">
-            <a:schemeClr val="accent1"/>
-          </a:lnRef>
-          <a:fillRef idx="0">
-            <a:schemeClr val="accent1"/>
-          </a:fillRef>
-          <a:effectRef idx="1">
-            <a:schemeClr val="accent1"/>
-          </a:effectRef>
-          <a:fontRef idx="minor">
-            <a:schemeClr val="tx1"/>
-          </a:fontRef>
-        </p:style>
-      </p:cxnSp>
-      <p:cxnSp>
-        <p:nvCxnSpPr>
-          <p:cNvPr id="5" name="Connector 4"/>
-          <p:cNvCxnSpPr/>
-          <p:nvPr/>
-        </p:nvCxnSpPr>
-        <p:spPr>
-          <a:xfrm>
-            <a:off x="9144000" y="3365500"/>
-            <a:ext cx="2000250" cy="0"/>
-          </a:xfrm>
-          <a:prstGeom prst="line">
-            <a:avLst/>
-          </a:prstGeom>
-          <a:ln w="781050">
-            <a:solidFill>
-              <a:srgbClr val="000000">
-                <a:alpha val="0"/>
-              </a:srgbClr>
-            </a:solidFill>
-          </a:ln>
-        </p:spPr>
-        <p:style>
-          <a:lnRef idx="2">
-            <a:schemeClr val="accent1"/>
-          </a:lnRef>
-          <a:fillRef idx="0">
-            <a:schemeClr val="accent1"/>
-          </a:fillRef>
-          <a:effectRef idx="1">
-            <a:schemeClr val="accent1"/>
-          </a:effectRef>
-          <a:fontRef idx="minor">
-            <a:schemeClr val="tx1"/>
-          </a:fontRef>
-        </p:style>
-      </p:cxnSp>
-      <p:cxnSp>
-        <p:nvCxnSpPr>
-          <p:cNvPr id="6" name="Connector 5"/>
-          <p:cNvCxnSpPr/>
-          <p:nvPr/>
-        </p:nvCxnSpPr>
-        <p:spPr>
-          <a:xfrm>
-            <a:off x="11144250" y="1809750"/>
-            <a:ext cx="0" cy="1555750"/>
-          </a:xfrm>
-          <a:prstGeom prst="line">
-            <a:avLst/>
-          </a:prstGeom>
-          <a:ln w="508000">
-            <a:solidFill>
-              <a:srgbClr val="EDEB63"/>
-            </a:solidFill>
-          </a:ln>
-        </p:spPr>
-        <p:style>
-          <a:lnRef idx="2">
-            <a:schemeClr val="accent1"/>
-          </a:lnRef>
-          <a:fillRef idx="0">
-            <a:schemeClr val="accent1"/>
-          </a:fillRef>
-          <a:effectRef idx="1">
-            <a:schemeClr val="accent1"/>
-          </a:effectRef>
-          <a:fontRef idx="minor">
-            <a:schemeClr val="tx1"/>
-          </a:fontRef>
-        </p:style>
-      </p:cxnSp>
-      <p:sp>
-        <p:nvSpPr>
-          <p:cNvPr id="7" name="TextBox 6"/>
+      <p:sp>
+        <p:nvSpPr>
+          <p:cNvPr id="4" name="TextBox 3"/>
           <p:cNvSpPr txBox="1"/>
           <p:nvPr/>
         </p:nvSpPr>
@@ -3335,7 +3250,7 @@
       </p:sp>
       <p:sp>
         <p:nvSpPr>
-          <p:cNvPr id="8" name="TextBox 7"/>
+          <p:cNvPr id="5" name="TextBox 4"/>
           <p:cNvSpPr txBox="1"/>
           <p:nvPr/>
         </p:nvSpPr>
@@ -3374,7 +3289,7 @@
       </p:sp>
       <p:sp>
         <p:nvSpPr>
-          <p:cNvPr id="9" name="TextBox 8"/>
+          <p:cNvPr id="6" name="TextBox 5"/>
           <p:cNvSpPr txBox="1"/>
           <p:nvPr/>
         </p:nvSpPr>
@@ -3427,7 +3342,7 @@
       </p:sp>
       <p:sp>
         <p:nvSpPr>
-          <p:cNvPr id="10" name="TextBox 9"/>
+          <p:cNvPr id="7" name="TextBox 6"/>
           <p:cNvSpPr txBox="1"/>
           <p:nvPr/>
         </p:nvSpPr>
@@ -3480,7 +3395,7 @@
       </p:sp>
       <p:sp>
         <p:nvSpPr>
-          <p:cNvPr id="11" name="TextBox 10"/>
+          <p:cNvPr id="8" name="TextBox 7"/>
           <p:cNvSpPr txBox="1"/>
           <p:nvPr/>
         </p:nvSpPr>
@@ -3552,7 +3467,7 @@
         <p:spPr>
           <a:xfrm>
             <a:off x="6794500" y="2159000"/>
-            <a:ext cx="12700" cy="3238500"/>
+            <a:ext cx="12700" cy="3683000"/>
           </a:xfrm>
           <a:prstGeom prst="rect">
             <a:avLst/>
@@ -3571,7 +3486,7 @@
           <a:fillRef idx="3">
             <a:schemeClr val="accent1"/>
           </a:fillRef>
-          <a:effectRef idx="2">
+          <a:effectRef idx="0">
             <a:schemeClr val="accent1"/>
           </a:effectRef>
           <a:fontRef idx="minor">
@@ -3907,7 +3822,7 @@
           <a:fillRef idx="3">
             <a:schemeClr val="accent1"/>
           </a:fillRef>
-          <a:effectRef idx="2">
+          <a:effectRef idx="0">
             <a:schemeClr val="accent1"/>
           </a:effectRef>
           <a:fontRef idx="minor">
@@ -3950,7 +3865,7 @@
           <a:fillRef idx="3">
             <a:schemeClr val="accent1"/>
           </a:fillRef>
-          <a:effectRef idx="2">
+          <a:effectRef idx="0">
             <a:schemeClr val="accent1"/>
           </a:effectRef>
           <a:fontRef idx="minor">
@@ -3993,7 +3908,7 @@
           <a:fillRef idx="3">
             <a:schemeClr val="accent1"/>
           </a:fillRef>
-          <a:effectRef idx="2">
+          <a:effectRef idx="0">
             <a:schemeClr val="accent1"/>
           </a:effectRef>
           <a:fontRef idx="minor">
@@ -4507,7 +4422,7 @@
           <a:fillRef idx="3">
             <a:schemeClr val="accent1"/>
           </a:fillRef>
-          <a:effectRef idx="2">
+          <a:effectRef idx="0">
             <a:schemeClr val="accent1"/>
           </a:effectRef>
           <a:fontRef idx="minor">
@@ -4550,7 +4465,7 @@
           <a:fillRef idx="3">
             <a:schemeClr val="accent1"/>
           </a:fillRef>
-          <a:effectRef idx="2">
+          <a:effectRef idx="0">
             <a:schemeClr val="accent1"/>
           </a:effectRef>
           <a:fontRef idx="minor">
@@ -4592,7 +4507,7 @@
           <a:fillRef idx="0">
             <a:schemeClr val="accent1"/>
           </a:fillRef>
-          <a:effectRef idx="1">
+          <a:effectRef idx="0">
             <a:schemeClr val="accent1"/>
           </a:effectRef>
           <a:fontRef idx="minor">
@@ -4628,7 +4543,7 @@
           <a:fillRef idx="3">
             <a:schemeClr val="accent1"/>
           </a:fillRef>
-          <a:effectRef idx="2">
+          <a:effectRef idx="0">
             <a:schemeClr val="accent1"/>
           </a:effectRef>
           <a:fontRef idx="minor">
@@ -4670,7 +4585,7 @@
           <a:fillRef idx="0">
             <a:schemeClr val="accent1"/>
           </a:fillRef>
-          <a:effectRef idx="1">
+          <a:effectRef idx="0">
             <a:schemeClr val="accent1"/>
           </a:effectRef>
           <a:fontRef idx="minor">
@@ -4705,7 +4620,7 @@
           <a:fillRef idx="0">
             <a:schemeClr val="accent1"/>
           </a:fillRef>
-          <a:effectRef idx="1">
+          <a:effectRef idx="0">
             <a:schemeClr val="accent1"/>
           </a:effectRef>
           <a:fontRef idx="minor">
@@ -5317,7 +5232,7 @@
         </p:nvCxnSpPr>
         <p:spPr>
           <a:xfrm>
-            <a:off x="698500" y="4827389"/>
+            <a:off x="698500" y="4507409"/>
             <a:ext cx="2667000" cy="0"/>
           </a:xfrm>
           <a:prstGeom prst="line">
@@ -5336,7 +5251,7 @@
           <a:fillRef idx="0">
             <a:schemeClr val="accent1"/>
           </a:fillRef>
-          <a:effectRef idx="1">
+          <a:effectRef idx="0">
             <a:schemeClr val="accent1"/>
           </a:effectRef>
           <a:fontRef idx="minor">
@@ -5352,8 +5267,8 @@
         </p:nvSpPr>
         <p:spPr>
           <a:xfrm>
-            <a:off x="698500" y="4827389"/>
-            <a:ext cx="2667000" cy="792361"/>
+            <a:off x="698500" y="4507409"/>
+            <a:ext cx="2667000" cy="1112341"/>
           </a:xfrm>
           <a:prstGeom prst="rect">
             <a:avLst/>
@@ -5379,6 +5294,9 @@
               </a:rPr>
               <a:t>01</a:t>
             </a:r>
+            <a:br>
+              <a:rPr sz="1400"/>
+            </a:br>
             <a:r>
               <a:rPr lang="zh-CN" sz="1400" dirty="0">
                 <a:solidFill>
@@ -5415,7 +5333,7 @@
         </p:nvCxnSpPr>
         <p:spPr>
           <a:xfrm>
-            <a:off x="3714750" y="4827389"/>
+            <a:off x="3714750" y="4507409"/>
             <a:ext cx="2667000" cy="0"/>
           </a:xfrm>
           <a:prstGeom prst="line">
@@ -5434,7 +5352,7 @@
           <a:fillRef idx="0">
             <a:schemeClr val="accent1"/>
           </a:fillRef>
-          <a:effectRef idx="1">
+          <a:effectRef idx="0">
             <a:schemeClr val="accent1"/>
           </a:effectRef>
           <a:fontRef idx="minor">
@@ -5450,8 +5368,8 @@
         </p:nvSpPr>
         <p:spPr>
           <a:xfrm>
-            <a:off x="3714750" y="4827389"/>
-            <a:ext cx="2667000" cy="792361"/>
+            <a:off x="3714750" y="4507409"/>
+            <a:ext cx="2667000" cy="1112341"/>
           </a:xfrm>
           <a:prstGeom prst="rect">
             <a:avLst/>
@@ -5477,6 +5395,9 @@
               </a:rPr>
               <a:t>02</a:t>
             </a:r>
+            <a:br>
+              <a:rPr sz="1400"/>
+            </a:br>
             <a:r>
               <a:rPr lang="zh-CN" sz="1400" dirty="0">
                 <a:solidFill>
@@ -5513,7 +5434,7 @@
         </p:nvCxnSpPr>
         <p:spPr>
           <a:xfrm>
-            <a:off x="6731000" y="4827389"/>
+            <a:off x="6731000" y="4507409"/>
             <a:ext cx="2667000" cy="0"/>
           </a:xfrm>
           <a:prstGeom prst="line">
@@ -5532,7 +5453,7 @@
           <a:fillRef idx="0">
             <a:schemeClr val="accent1"/>
           </a:fillRef>
-          <a:effectRef idx="1">
+          <a:effectRef idx="0">
             <a:schemeClr val="accent1"/>
           </a:effectRef>
           <a:fontRef idx="minor">
@@ -5548,8 +5469,8 @@
         </p:nvSpPr>
         <p:spPr>
           <a:xfrm>
-            <a:off x="6731000" y="4827389"/>
-            <a:ext cx="2667000" cy="792361"/>
+            <a:off x="6731000" y="4507409"/>
+            <a:ext cx="2667000" cy="1112341"/>
           </a:xfrm>
           <a:prstGeom prst="rect">
             <a:avLst/>
@@ -5575,6 +5496,9 @@
               </a:rPr>
               <a:t>03</a:t>
             </a:r>
+            <a:br>
+              <a:rPr sz="1400"/>
+            </a:br>
             <a:r>
               <a:rPr lang="zh-CN" sz="1400" dirty="0">
                 <a:solidFill>
